--- a/01_FoundationProjects/MFL04_Stepper_Motor_Control/MFL04_Stepper_Motor_Control.pptx
+++ b/01_FoundationProjects/MFL04_Stepper_Motor_Control/MFL04_Stepper_Motor_Control.pptx
@@ -202,7 +202,7 @@
           <a:p>
             <a:fld id="{D6511432-EC56-427D-A32A-0750225838C8}" type="datetimeFigureOut">
               <a:rPr lang="en-GB" smtClean="0"/>
-              <a:t>26/12/2025</a:t>
+              <a:t>18/01/2026</a:t>
             </a:fld>
             <a:endParaRPr lang="en-GB"/>
           </a:p>
@@ -5478,7 +5478,7 @@
         <p:spPr>
           <a:xfrm>
             <a:off x="1039495" y="2622462"/>
-            <a:ext cx="4309253" cy="1200329"/>
+            <a:ext cx="4309253" cy="1477328"/>
           </a:xfrm>
           <a:prstGeom prst="rect">
             <a:avLst/>
@@ -5502,7 +5502,7 @@
               <a:rPr lang="en-GB" dirty="0">
                 <a:hlinkClick r:id="rId2"/>
               </a:rPr>
-              <a:t>https://github.com/info-zas/zas-robotics-motion/blob/main/01_FoundationProjects/MFL04/MFL04/MFL04.ino</a:t>
+              <a:t>https://github.com/info-zas/zas-robotics-motion/tree/main/01_FoundationProjects/MFL04_Stepper_Motor_Control/MFL04_Stepper_Motor_Control</a:t>
             </a:r>
             <a:endParaRPr lang="en-GB" dirty="0"/>
           </a:p>
@@ -5637,7 +5637,7 @@
             </a:pPr>
             <a:r>
               <a:rPr lang="en-GB" b="1" dirty="0"/>
-              <a:t>Code for Lesson MFL04 (MFL04.ino):</a:t>
+              <a:t>Code for Lesson MFL04 (MFL04_Stepper_Motor_Control.ino):</a:t>
             </a:r>
           </a:p>
         </p:txBody>
@@ -5855,54 +5855,6 @@
       </p:sp>
       <p:sp>
         <p:nvSpPr>
-          <p:cNvPr id="4" name="TextBox 3">
-            <a:extLst>
-              <a:ext uri="{FF2B5EF4-FFF2-40B4-BE49-F238E27FC236}">
-                <a16:creationId xmlns:a16="http://schemas.microsoft.com/office/drawing/2014/main" id="{AC514551-EBEB-F0C1-E417-FCBD36193F47}"/>
-              </a:ext>
-            </a:extLst>
-          </p:cNvPr>
-          <p:cNvSpPr txBox="1"/>
-          <p:nvPr/>
-        </p:nvSpPr>
-        <p:spPr>
-          <a:xfrm>
-            <a:off x="449560" y="3228088"/>
-            <a:ext cx="4885191" cy="1200329"/>
-          </a:xfrm>
-          <a:prstGeom prst="rect">
-            <a:avLst/>
-          </a:prstGeom>
-          <a:noFill/>
-          <a:ln>
-            <a:solidFill>
-              <a:schemeClr val="accent1">
-                <a:lumMod val="75000"/>
-              </a:schemeClr>
-            </a:solidFill>
-          </a:ln>
-        </p:spPr>
-        <p:txBody>
-          <a:bodyPr wrap="square">
-            <a:spAutoFit/>
-          </a:bodyPr>
-          <a:lstStyle/>
-          <a:p>
-            <a:r>
-              <a:rPr lang="en-GB" dirty="0">
-                <a:hlinkClick r:id="rId3"/>
-              </a:rPr>
-              <a:t>https://github.com/info-zas/zas-robotics-motion/blob/main/01_FoundationProjects/MFL04/MFL04/MFL04.ino</a:t>
-            </a:r>
-            <a:endParaRPr lang="en-GB" dirty="0"/>
-          </a:p>
-          <a:p>
-            <a:endParaRPr lang="en-GB" dirty="0"/>
-          </a:p>
-        </p:txBody>
-      </p:sp>
-      <p:sp>
-        <p:nvSpPr>
           <p:cNvPr id="5" name="Date Placeholder 4">
             <a:extLst>
               <a:ext uri="{FF2B5EF4-FFF2-40B4-BE49-F238E27FC236}">
@@ -5973,7 +5925,7 @@
           <p:nvPr/>
         </p:nvPicPr>
         <p:blipFill>
-          <a:blip r:embed="rId4" cstate="print">
+          <a:blip r:embed="rId3" cstate="print">
             <a:extLst>
               <a:ext uri="{28A0092B-C50C-407E-A947-70E740481C1C}">
                 <a14:useLocalDpi xmlns:a14="http://schemas.microsoft.com/office/drawing/2010/main" val="0"/>
@@ -5996,10 +5948,10 @@
       </p:pic>
       <p:sp>
         <p:nvSpPr>
-          <p:cNvPr id="8" name="TextBox 7">
-            <a:extLst>
-              <a:ext uri="{FF2B5EF4-FFF2-40B4-BE49-F238E27FC236}">
-                <a16:creationId xmlns:a16="http://schemas.microsoft.com/office/drawing/2014/main" id="{D7DF7401-7F8F-E95B-27A4-2AA8778C4C10}"/>
+          <p:cNvPr id="10" name="TextBox 9">
+            <a:extLst>
+              <a:ext uri="{FF2B5EF4-FFF2-40B4-BE49-F238E27FC236}">
+                <a16:creationId xmlns:a16="http://schemas.microsoft.com/office/drawing/2014/main" id="{BD75EF04-10C3-6EE7-60AD-16FD8F6C5B1E}"/>
               </a:ext>
             </a:extLst>
           </p:cNvPr>
@@ -6008,8 +5960,56 @@
         </p:nvSpPr>
         <p:spPr>
           <a:xfrm>
-            <a:off x="370124" y="2755966"/>
-            <a:ext cx="3946237" cy="369332"/>
+            <a:off x="564823" y="4807000"/>
+            <a:ext cx="4309253" cy="1477328"/>
+          </a:xfrm>
+          <a:prstGeom prst="rect">
+            <a:avLst/>
+          </a:prstGeom>
+          <a:noFill/>
+          <a:ln w="28575">
+            <a:solidFill>
+              <a:schemeClr val="accent1">
+                <a:lumMod val="75000"/>
+              </a:schemeClr>
+            </a:solidFill>
+          </a:ln>
+        </p:spPr>
+        <p:txBody>
+          <a:bodyPr wrap="square">
+            <a:spAutoFit/>
+          </a:bodyPr>
+          <a:lstStyle/>
+          <a:p>
+            <a:r>
+              <a:rPr lang="en-GB" dirty="0">
+                <a:hlinkClick r:id="rId4"/>
+              </a:rPr>
+              <a:t>https://github.com/info-zas/zas-robotics-motion/tree/main/01_FoundationProjects/MFL04_Stepper_Motor_Control/MFL04_Stepper_Motor_Control</a:t>
+            </a:r>
+            <a:endParaRPr lang="en-GB" dirty="0"/>
+          </a:p>
+          <a:p>
+            <a:endParaRPr lang="en-GB" dirty="0"/>
+          </a:p>
+        </p:txBody>
+      </p:sp>
+      <p:sp>
+        <p:nvSpPr>
+          <p:cNvPr id="12" name="TextBox 11">
+            <a:extLst>
+              <a:ext uri="{FF2B5EF4-FFF2-40B4-BE49-F238E27FC236}">
+                <a16:creationId xmlns:a16="http://schemas.microsoft.com/office/drawing/2014/main" id="{433CF8FA-3733-F5E8-DC54-87AB3843101F}"/>
+              </a:ext>
+            </a:extLst>
+          </p:cNvPr>
+          <p:cNvSpPr txBox="1"/>
+          <p:nvPr/>
+        </p:nvSpPr>
+        <p:spPr>
+          <a:xfrm>
+            <a:off x="449560" y="4428417"/>
+            <a:ext cx="6096000" cy="369332"/>
           </a:xfrm>
           <a:prstGeom prst="rect">
             <a:avLst/>
@@ -6027,7 +6027,7 @@
             </a:pPr>
             <a:r>
               <a:rPr lang="en-GB" b="1" dirty="0"/>
-              <a:t>Code for Lesson MFL04 (MFL04.ino):</a:t>
+              <a:t>Code for Lesson MFL04 (MFL04_Stepper_Motor_Control.ino):</a:t>
             </a:r>
           </a:p>
         </p:txBody>
